--- a/media/resources/files/Onduktar_Akcha_Aky_Toloo_XjanaO_QMtC44c.pptx
+++ b/media/resources/files/Onduktar_Akcha_Aky_Toloo_XjanaO_QMtC44c.pptx
@@ -11221,7 +11221,7 @@
                 <a:ea typeface="+mn-ea"/>
                 <a:cs typeface="+mn-cs"/>
               </a:rPr>
-              <a:t>Турдуу пикирлер учун ыраазычылык билдиребиз.</a:t>
+              <a:t>Түрдүү пикирлер үчүн ыраазычылык билдиребиз.</a:t>
             </a:r>
           </a:p>
           <a:p>

--- a/media/resources/files/Onduktar_Akcha_Aky_Toloo_XjanaO_QMtC44c.pptx
+++ b/media/resources/files/Onduktar_Akcha_Aky_Toloo_XjanaO_QMtC44c.pptx
@@ -3898,7 +3898,7 @@
                 <a:ea typeface="+mn-ea"/>
                 <a:cs typeface="Arial" panose="020B0604020202020204" pitchFamily="34" charset="0"/>
               </a:rPr>
-              <a:t>Мугалим үчүн жооп баракчасы жана таратма материалдар камтылган.</a:t>
+              <a:t>Мугалим үчүн жооп барагы жана таратма материалдар бар.</a:t>
             </a:r>
           </a:p>
           <a:p>
@@ -3963,7 +3963,7 @@
                 <a:ea typeface="+mn-ea"/>
                 <a:cs typeface="Arial" panose="020B0604020202020204" pitchFamily="34" charset="0"/>
               </a:rPr>
-              <a:t>Кайсы команда туура жооп бергенине жараша '</a:t>
+              <a:t>Туура жооп берген командага жараша «</a:t>
             </a:r>
             <a:r>
               <a:rPr kumimoji="0" lang="en-GB" sz="2000" b="0" i="0" u="sng" strike="noStrike" kern="1200" cap="none" spc="0" normalizeH="0" baseline="0" noProof="0" dirty="0">
@@ -3980,7 +3980,7 @@
                 <a:ea typeface="+mn-ea"/>
                 <a:cs typeface="Arial" panose="020B0604020202020204" pitchFamily="34" charset="0"/>
               </a:rPr>
-              <a:t>X' </a:t>
+              <a:t>X» </a:t>
             </a:r>
             <a:r>
               <a:rPr kumimoji="0" lang="ru-RU" sz="2000" b="0" i="0" u="sng" strike="noStrike" kern="1200" cap="none" spc="0" normalizeH="0" baseline="0" noProof="0" dirty="0">
@@ -3997,7 +3997,7 @@
                 <a:ea typeface="+mn-ea"/>
                 <a:cs typeface="Arial" panose="020B0604020202020204" pitchFamily="34" charset="0"/>
               </a:rPr>
-              <a:t>же '</a:t>
+              <a:t>же «</a:t>
             </a:r>
             <a:r>
               <a:rPr kumimoji="0" lang="en-GB" sz="2000" b="0" i="0" u="sng" strike="noStrike" kern="1200" cap="none" spc="0" normalizeH="0" baseline="0" noProof="0" dirty="0">
@@ -4014,7 +4014,7 @@
                 <a:ea typeface="+mn-ea"/>
                 <a:cs typeface="Arial" panose="020B0604020202020204" pitchFamily="34" charset="0"/>
               </a:rPr>
-              <a:t>O' </a:t>
+              <a:t>O» </a:t>
             </a:r>
             <a:r>
               <a:rPr kumimoji="0" lang="ru-RU" sz="2000" b="0" i="0" u="sng" strike="noStrike" kern="1200" cap="none" spc="0" normalizeH="0" baseline="0" noProof="0" dirty="0">
@@ -4031,7 +4031,7 @@
                 <a:ea typeface="+mn-ea"/>
                 <a:cs typeface="Arial" panose="020B0604020202020204" pitchFamily="34" charset="0"/>
               </a:rPr>
-              <a:t>баскычын басыңыз/тийип коюңуз</a:t>
+              <a:t>баскычын басыңыз</a:t>
             </a:r>
             <a:r>
               <a:rPr kumimoji="0" lang="en-GB" sz="2000" b="0" i="0" u="none" strike="noStrike" kern="1200" cap="none" spc="0" normalizeH="0" baseline="0" noProof="0" dirty="0">
@@ -10002,7 +10002,7 @@
           <a:p>
             <a:r>
               <a:rPr lang="en-US" sz="2400" dirty="0"/>
-              <a:t>11.50$</a:t>
+              <a:t>11,50$</a:t>
             </a:r>
             <a:r>
               <a:rPr lang="ky-KG" sz="2400" dirty="0"/>
@@ -10284,7 +10284,7 @@
           <a:p>
             <a:r>
               <a:rPr lang="en-US" sz="2400" dirty="0"/>
-              <a:t>12.50 $</a:t>
+              <a:t>12,50 $</a:t>
             </a:r>
           </a:p>
         </p:txBody>
@@ -10473,7 +10473,7 @@
           <a:p>
             <a:r>
               <a:rPr lang="en-US" sz="2400" dirty="0"/>
-              <a:t>6.5</a:t>
+              <a:t>6,5</a:t>
             </a:r>
             <a:r>
               <a:rPr lang="ky-KG" sz="2400" dirty="0"/>
@@ -10662,7 +10662,7 @@
           <a:p>
             <a:r>
               <a:rPr lang="en-US" sz="2400" dirty="0"/>
-              <a:t>71.79$</a:t>
+              <a:t>71,79$</a:t>
             </a:r>
           </a:p>
         </p:txBody>
